--- a/synopsis/Synopsis_Presentation_Gyandeep_Nath.pptx
+++ b/synopsis/Synopsis_Presentation_Gyandeep_Nath.pptx
@@ -2226,8 +2226,8 @@
         </p:blipFill>
         <p:spPr>
           <a:xfrm>
-            <a:off x="4224528" y="457200"/>
-            <a:ext cx="5266944" cy="859536"/>
+            <a:off x="5141892" y="457200"/>
+            <a:ext cx="3432216" cy="859536"/>
           </a:xfrm>
           <a:prstGeom prst="rect">
             <a:avLst/>
@@ -2350,7 +2350,7 @@
         <p:spPr>
           <a:xfrm>
             <a:off x="1097280" y="2743200"/>
-            <a:ext cx="11521440" cy="987552"/>
+            <a:ext cx="11521440" cy="1444752"/>
           </a:xfrm>
           <a:prstGeom prst="rect">
             <a:avLst/>
@@ -2432,7 +2432,7 @@
         <p:spPr>
           <a:xfrm>
             <a:off x="1463040" y="4526280"/>
-            <a:ext cx="10789920" cy="365252"/>
+            <a:ext cx="10789920" cy="657352"/>
           </a:xfrm>
           <a:prstGeom prst="rect">
             <a:avLst/>
@@ -2536,7 +2536,7 @@
         <p:spPr>
           <a:xfrm>
             <a:off x="1280160" y="6492240"/>
-            <a:ext cx="5120640" cy="339852"/>
+            <a:ext cx="5120640" cy="873252"/>
           </a:xfrm>
           <a:prstGeom prst="rect">
             <a:avLst/>
@@ -2618,7 +2618,7 @@
         <p:spPr>
           <a:xfrm>
             <a:off x="7315200" y="6492240"/>
-            <a:ext cx="5120640" cy="606552"/>
+            <a:ext cx="5120640" cy="873252"/>
           </a:xfrm>
           <a:prstGeom prst="rect">
             <a:avLst/>
@@ -5956,7 +5956,7 @@
                 <a:ea typeface="Times New Roman" pitchFamily="34" charset="-122"/>
                 <a:cs typeface="Times New Roman" pitchFamily="34" charset="-120"/>
               </a:rPr>
-              <a:t>Eye-aspect ratio, expressed relative to the open-eye baseline set at calibration.</a:t>
+              <a:t>Eye-aspect ratio (Soukupová &amp; Čech, 2016), expressed relative to the open-eye baseline set at calibration.</a:t>
             </a:r>
             <a:endParaRPr lang="en-US" sz="1100" dirty="0"/>
           </a:p>
@@ -7534,7 +7534,7 @@
                 <a:ea typeface="Times New Roman" pitchFamily="34" charset="-122"/>
                 <a:cs typeface="Times New Roman" pitchFamily="34" charset="-120"/>
               </a:rPr>
-              <a:t>Ccami-Bernal, F., Soriano-Moreno, D. R., Romero-Robles, M. A., Barriga-Chambi, F., Tuco, K. G., Castro-Diaz, S. D., … Benites-Zapata, V. A. (2024). Prevalence of computer vision syndrome: A systematic review and meta-analysis. </a:t>
+              <a:t>Ccami-Bernal, F., Soriano-Moreno, D. R., Romero-Robles, M. A., Barriga-Chambi, F., Tuco, K. G., Castro-Diaz, S. D., Nuñez-Lupaca, J. N., Pacheco-Mendoza, J., Galvez-Olortegui, T., &amp; Benites-Zapata, V. A. (2024). Prevalence of computer vision syndrome: A systematic review and meta-analysis. </a:t>
             </a:r>
             <a:r>
               <a:rPr lang="en-US" sz="1100" i="1" dirty="0">
@@ -8961,7 +8961,7 @@
         <p:spPr>
           <a:xfrm>
             <a:off x="731520" y="7726680"/>
-            <a:ext cx="12252960" cy="263652"/>
+            <a:ext cx="12252960" cy="454152"/>
           </a:xfrm>
           <a:prstGeom prst="rect">
             <a:avLst/>
@@ -8988,7 +8988,7 @@
                 <a:ea typeface="Times New Roman" pitchFamily="34" charset="-122"/>
                 <a:cs typeface="Times New Roman" pitchFamily="34" charset="-120"/>
               </a:rPr>
-              <a:t>Every reference listed has been checked against its PubMed record or, where PubMed does not index it, against the issuing authority. The verification record accompanies the synopsis.</a:t>
+              <a:t>22 of the 25 references above are confirmed field by field against their PubMed records. The remaining three are not indexed in PubMed; their metadata is corroborated by secondary sources but was not verified at the issuing authority, which this environment could not reach. The verification record accompanies the synopsis and states which is which.</a:t>
             </a:r>
             <a:endParaRPr lang="en-US" sz="1100" dirty="0"/>
           </a:p>
@@ -9042,8 +9042,8 @@
         </p:blipFill>
         <p:spPr>
           <a:xfrm>
-            <a:off x="4224528" y="2468880"/>
-            <a:ext cx="5266944" cy="859536"/>
+            <a:off x="5141892" y="2468880"/>
+            <a:ext cx="3432216" cy="859536"/>
           </a:xfrm>
           <a:prstGeom prst="rect">
             <a:avLst/>
@@ -9143,7 +9143,7 @@
         <p:spPr>
           <a:xfrm>
             <a:off x="914400" y="5852160"/>
-            <a:ext cx="11887200" cy="339852"/>
+            <a:ext cx="11887200" cy="606552"/>
           </a:xfrm>
           <a:prstGeom prst="rect">
             <a:avLst/>
@@ -11958,7 +11958,7 @@
         <p:spPr>
           <a:xfrm>
             <a:off x="7040880" y="1664208"/>
-            <a:ext cx="5943600" cy="3990340"/>
+            <a:ext cx="5943600" cy="3901440"/>
           </a:xfrm>
           <a:prstGeom prst="rect">
             <a:avLst/>
@@ -12057,7 +12057,7 @@
                 <a:ea typeface="Times New Roman" pitchFamily="34" charset="-122"/>
                 <a:cs typeface="Times New Roman" pitchFamily="34" charset="-120"/>
               </a:rPr>
-              <a:t>The evidence is not uniform, and the pattern of that disagreement determined the present design. The proofreading advantage was independent of ambient lighting (Buchner &amp; Baumgartner, 2007), whereas threshold legibility showed a clear interaction (Dobres </a:t>
+              <a:t>The evidence is not uniform, and that disagreement determined the present design: the proofreading advantage was independent of ambient lighting (Buchner &amp; Baumgartner, 2007) whereas threshold legibility showed a clear interaction (Dobres </a:t>
             </a:r>
             <a:r>
               <a:rPr lang="en-US" sz="1200" i="1" dirty="0">
@@ -12079,7 +12079,7 @@
                 <a:ea typeface="Times New Roman" pitchFamily="34" charset="-122"/>
                 <a:cs typeface="Times New Roman" pitchFamily="34" charset="-120"/>
               </a:rPr>
-              <a:t>, 2017).</a:t>
+              <a:t>, 2017). The performance-side effect of polarity appears not to depend on room light; the effects that do are concentrated in the ocular and tear-film measures.</a:t>
             </a:r>
             <a:endParaRPr lang="en-US" sz="1200" dirty="0"/>
           </a:p>
@@ -12103,7 +12103,29 @@
                 <a:ea typeface="Times New Roman" pitchFamily="34" charset="-122"/>
                 <a:cs typeface="Times New Roman" pitchFamily="34" charset="-120"/>
               </a:rPr>
-              <a:t>That is, the performance-side effect of polarity appears not to depend on room light, while the effects that do depend on it are concentrated in the ocular and tear-film measures.</a:t>
+              <a:t>Lin, M., </a:t>
+            </a:r>
+            <a:r>
+              <a:rPr lang="en-US" sz="1200" i="1" dirty="0">
+                <a:solidFill>
+                  <a:srgbClr val="000000"/>
+                </a:solidFill>
+                <a:latin typeface="Times New Roman" pitchFamily="34" charset="0"/>
+                <a:ea typeface="Times New Roman" pitchFamily="34" charset="-122"/>
+                <a:cs typeface="Times New Roman" pitchFamily="34" charset="-120"/>
+              </a:rPr>
+              <a:t>et al.</a:t>
+            </a:r>
+            <a:r>
+              <a:rPr lang="en-US" sz="1200" dirty="0">
+                <a:solidFill>
+                  <a:srgbClr val="000000"/>
+                </a:solidFill>
+                <a:latin typeface="Times New Roman" pitchFamily="34" charset="0"/>
+                <a:ea typeface="Times New Roman" pitchFamily="34" charset="-122"/>
+                <a:cs typeface="Times New Roman" pitchFamily="34" charset="-120"/>
+              </a:rPr>
+              <a:t> (2025) is the most directly relevant work on that second point: reading in a dark room from a bright screen produced the greatest tear-film destabilisation and the largest blink changes, with incomplete blinking rising over time in every condition.</a:t>
             </a:r>
             <a:endParaRPr lang="en-US" sz="1200" dirty="0"/>
           </a:p>
@@ -12127,53 +12149,7 @@
                 <a:ea typeface="Times New Roman" pitchFamily="34" charset="-122"/>
                 <a:cs typeface="Times New Roman" pitchFamily="34" charset="-120"/>
               </a:rPr>
-              <a:t>Lin, M., </a:t>
-            </a:r>
-            <a:r>
-              <a:rPr lang="en-US" sz="1200" i="1" dirty="0">
-                <a:solidFill>
-                  <a:srgbClr val="000000"/>
-                </a:solidFill>
-                <a:latin typeface="Times New Roman" pitchFamily="34" charset="0"/>
-                <a:ea typeface="Times New Roman" pitchFamily="34" charset="-122"/>
-                <a:cs typeface="Times New Roman" pitchFamily="34" charset="-120"/>
-              </a:rPr>
-              <a:t>et al.</a:t>
-            </a:r>
-            <a:r>
-              <a:rPr lang="en-US" sz="1200" dirty="0">
-                <a:solidFill>
-                  <a:srgbClr val="000000"/>
-                </a:solidFill>
-                <a:latin typeface="Times New Roman" pitchFamily="34" charset="0"/>
-                <a:ea typeface="Times New Roman" pitchFamily="34" charset="-122"/>
-                <a:cs typeface="Times New Roman" pitchFamily="34" charset="-120"/>
-              </a:rPr>
-              <a:t> (2025) is the most directly relevant work on that second point: reading in a dark room from a bright screen produced the greatest tear-film destabilisation and the largest blink changes, with incomplete blinking rising over time in every condition.</a:t>
-            </a:r>
-            <a:endParaRPr lang="en-US" sz="1200" dirty="0"/>
-          </a:p>
-          <a:p>
-            <a:pPr marL="203200" indent="-203200">
-              <a:lnSpc>
-                <a:spcPts val="1600"/>
-              </a:lnSpc>
-              <a:spcAft>
-                <a:spcPts val="700"/>
-              </a:spcAft>
-              <a:buSzPct val="100000"/>
-              <a:buChar char="•"/>
-            </a:pPr>
-            <a:r>
-              <a:rPr lang="en-US" sz="1200" dirty="0">
-                <a:solidFill>
-                  <a:srgbClr val="000000"/>
-                </a:solidFill>
-                <a:latin typeface="Times New Roman" pitchFamily="34" charset="0"/>
-                <a:ea typeface="Times New Roman" pitchFamily="34" charset="-122"/>
-                <a:cs typeface="Times New Roman" pitchFamily="34" charset="-120"/>
-              </a:rPr>
-              <a:t>Ambient illuminance is accordingly held constant here at a single measured level rather than manipulated. The grounds are set out under Methods.</a:t>
+              <a:t>Ambient illuminance is accordingly held constant here at a single measured level rather than manipulated. What that forfeits is stated plainly: Sethi and Ziat (2023) located the cognitive cost of negative polarity in younger adults specifically under dim conditions, and this design cannot speak to it.</a:t>
             </a:r>
             <a:endParaRPr lang="en-US" sz="1200" dirty="0"/>
           </a:p>
@@ -12187,7 +12163,7 @@
         </p:nvSpPr>
         <p:spPr>
           <a:xfrm>
-            <a:off x="731520" y="5883148"/>
+            <a:off x="731520" y="5794248"/>
             <a:ext cx="12252960" cy="292608"/>
           </a:xfrm>
           <a:prstGeom prst="rect">
@@ -12226,7 +12202,7 @@
         </p:nvSpPr>
         <p:spPr>
           <a:xfrm>
-            <a:off x="731520" y="6267196"/>
+            <a:off x="731520" y="6178296"/>
             <a:ext cx="12252960" cy="1780540"/>
           </a:xfrm>
           <a:prstGeom prst="rect">
@@ -12306,7 +12282,7 @@
                 <a:ea typeface="Times New Roman" pitchFamily="34" charset="-122"/>
                 <a:cs typeface="Times New Roman" pitchFamily="34" charset="-120"/>
               </a:rPr>
-              <a:t>Undersampling biases the measured minimum eyelid aperture upward, inflating the incomplete-blink ratio in the direction the hypothesis predicts — and an artefact of that shape is indistinguishable from the effect it imitates. A narrower question answered with a trustworthy instrument was therefore preferred; what that forfeits is stated in the synopsis.</a:t>
+              <a:t>Undersampling biases the measured minimum eyelid aperture upward, inflating the incomplete-blink ratio in the direction the hypothesis predicts — and an artefact of that shape is indistinguishable from the effect it imitates. A narrower question answered with a trustworthy instrument was therefore preferred.</a:t>
             </a:r>
             <a:endParaRPr lang="en-US" sz="1200" dirty="0"/>
           </a:p>
